--- a/AI_Summer_League_Demo_plain.pptx
+++ b/AI_Summer_League_Demo_plain.pptx
@@ -1669,7 +1669,7 @@
           <a:p>
             <a:r>
               <a:rPr lang="en-US" dirty="0"/>
-              <a:t>North Holly: 2025 refunding, BBB+. Four documents. The quality review already found real inconsistencies, so we have an answer key.</a:t>
+              <a:t>Anonymized district (name withheld on all slides/screenshots): 2025 refunding, BBB+. Four documents. The quality review already found real inconsistencies, so we have an answer key.</a:t>
             </a:r>
             <a:endParaRPr lang="en-US" dirty="0"/>
           </a:p>
@@ -6789,7 +6789,7 @@
                 <a:ea typeface="Arial" pitchFamily="34" charset="-122"/>
                 <a:cs typeface="Arial" pitchFamily="34" charset="-120"/>
               </a:rPr>
-              <a:t>North Holly Metropolitan District, CO — Colorado metro district; series 2025 GO refunding bonds, rated BBB+ in Nov 2025.</a:t>
+              <a:t>A Colorado metropolitan district (name withheld — internal file) — series 2025 GO refunding bonds, rated BBB+ in Nov 2025.</a:t>
             </a:r>
             <a:endParaRPr lang="en-US" sz="1500" dirty="0"/>
           </a:p>
@@ -6810,7 +6810,7 @@
                 <a:ea typeface="Arial" pitchFamily="34" charset="-122"/>
                 <a:cs typeface="Arial" pitchFamily="34" charset="-120"/>
               </a:rPr>
-              <a:t>[ live: open the published article PDF — show what it looks like; the issuer, the rated bonds, the rating and date ]</a:t>
+              <a:t>[ live/screenshot: published article first page, entity name redacted — what it looks like; the rated bonds, the rating and date ]</a:t>
             </a:r>
             <a:endParaRPr lang="en-US" sz="1400" dirty="0"/>
           </a:p>
@@ -8786,7 +8786,7 @@
                 <a:ea typeface="Courier New" pitchFamily="34" charset="-122"/>
                 <a:cs typeface="Courier New" pitchFamily="34" charset="-120"/>
               </a:rPr>
-              <a:t>"You are reviewing a credit rating file. The uploaded documents include the internal rating documents (the RAMP and the MUD RSR model output), the published rating article, and the rating criteria for North Holly Metropolitan District, CO. Find all inconsistencies between the internal documents and the published rating article. List each inconsistency, showing the value from each document."</a:t>
+              <a:t>"You are reviewing a credit rating file. The uploaded documents include the internal rating documents (the RAMP and the MUD RSR model output), the published rating article, and the rating criteria for the district. Find all inconsistencies between the internal documents and the published rating article. List each inconsistency, showing the value from each document."</a:t>
             </a:r>
             <a:endParaRPr lang="en-US" sz="1250" dirty="0"/>
           </a:p>

--- a/AI_Summer_League_Demo_plain.pptx
+++ b/AI_Summer_League_Demo_plain.pptx
@@ -2741,7 +2741,7 @@
                 <a:ea typeface="Arial" pitchFamily="34" charset="-122"/>
                 <a:cs typeface="Arial" pitchFamily="34" charset="-120"/>
               </a:rPr>
-              <a:t>Before writing any new prompt, we stopped and listed what a human reviewer actually does with these documents:</a:t>
+              <a:t>What does a human reviewer actually do with these documents?</a:t>
             </a:r>
             <a:endParaRPr lang="en-US" sz="1500" dirty="0"/>
           </a:p>
@@ -2783,7 +2783,7 @@
                 <a:ea typeface="Arial" pitchFamily="34" charset="-122"/>
                 <a:cs typeface="Arial" pitchFamily="34" charset="-120"/>
               </a:rPr>
-              <a:t>That list IS the pipeline. The steps come directly from how the checking work is actually done.</a:t>
+              <a:t>That list IS the pipeline.</a:t>
             </a:r>
             <a:endParaRPr lang="en-US" sz="1500" dirty="0"/>
           </a:p>
@@ -2804,7 +2804,7 @@
                 <a:ea typeface="Arial" pitchFamily="34" charset="-122"/>
                 <a:cs typeface="Arial" pitchFamily="34" charset="-120"/>
               </a:rPr>
-              <a:t>The technique is not fancy, and we don’t need fancy words. We just wrote the checking procedure down as clearly as we could, instead of hoping the model would invent one.</a:t>
+              <a:t>No fancy technique — the checking procedure written down explicitly.</a:t>
             </a:r>
             <a:endParaRPr lang="en-US" sz="1500" dirty="0"/>
           </a:p>
@@ -2825,7 +2825,7 @@
                 <a:ea typeface="Arial" pitchFamily="34" charset="-122"/>
                 <a:cs typeface="Arial" pitchFamily="34" charset="-120"/>
               </a:rPr>
-              <a:t>Think of it as briefing a brand-new intern: full context, clear instructions, and only simple tasks.</a:t>
+              <a:t>Like briefing a brand-new intern: full context, clear instructions, simple tasks.</a:t>
             </a:r>
             <a:endParaRPr lang="en-US" sz="1500" dirty="0"/>
           </a:p>
@@ -3482,7 +3482,7 @@
                 <a:ea typeface="Arial" pitchFamily="34" charset="-122"/>
                 <a:cs typeface="Arial" pitchFamily="34" charset="-120"/>
               </a:rPr>
-              <a:t>Real prompt excerpts, shortened — plain English, no fancy words.</a:t>
+              <a:t>Real prompt excerpts, shortened.</a:t>
             </a:r>
             <a:endParaRPr lang="en-US" sz="1500" dirty="0"/>
           </a:p>
@@ -3503,7 +3503,7 @@
                 <a:ea typeface="Arial" pitchFamily="34" charset="-122"/>
                 <a:cs typeface="Arial" pitchFamily="34" charset="-120"/>
               </a:rPr>
-              <a:t>Note what the prompts contain: what these documents generally look like, and the rules of the task. Never which fields are wrong in this file.</a:t>
+              <a:t>Prompts contain template knowledge and task rules — never the answers.</a:t>
             </a:r>
             <a:endParaRPr lang="en-US" sz="1500" dirty="0"/>
           </a:p>
@@ -3771,7 +3771,7 @@
                 <a:ea typeface="Arial" pitchFamily="34" charset="-122"/>
                 <a:cs typeface="Arial" pitchFamily="34" charset="-120"/>
               </a:rPr>
-              <a:t>Only the instructions. Every fix was a general rule — we never told it the answers.</a:t>
+              <a:t>Only the instructions — every fix a general rule; never the answers.</a:t>
             </a:r>
             <a:endParaRPr lang="en-US" sz="1050" dirty="0"/>
           </a:p>
@@ -3913,7 +3913,7 @@
                 <a:ea typeface="Arial" pitchFamily="34" charset="-122"/>
                 <a:cs typeface="Arial" pitchFamily="34" charset="-120"/>
               </a:rPr>
-              <a:t>Each round we read the step outputs, found the cause, and changed the instructions. The pipeline shows you where it fails — a one-shot doesn’t.</a:t>
+              <a:t>Read step outputs → find cause → fix instructions. The pipeline shows where it fails.</a:t>
             </a:r>
             <a:endParaRPr lang="en-US" sz="1050" dirty="0"/>
           </a:p>
@@ -4055,7 +4055,7 @@
                 <a:ea typeface="Arial" pitchFamily="34" charset="-122"/>
                 <a:cs typeface="Arial" pitchFamily="34" charset="-120"/>
               </a:rPr>
-              <a:t>When a step underperforms, you can see it and fix the instructions. A bad one-shot answer gives you nothing to fix.</a:t>
+              <a:t>A step that underperforms can be seen and fixed. A bad one-shot gives nothing to fix.</a:t>
             </a:r>
             <a:endParaRPr lang="en-US" sz="1250" dirty="0"/>
           </a:p>
@@ -5393,7 +5393,7 @@
                 <a:ea typeface="Arial" pitchFamily="34" charset="-122"/>
                 <a:cs typeface="Arial" pitchFamily="34" charset="-120"/>
               </a:rPr>
-              <a:t>Fair question. Yes — this prompt set is carved for one class of files: district ratings built on the MUD RSR template.</a:t>
+              <a:t>Yes — carved for one class of files: district ratings on the MUD RSR template.</a:t>
             </a:r>
             <a:endParaRPr lang="en-US" sz="1500" dirty="0"/>
           </a:p>
@@ -5414,7 +5414,7 @@
                 <a:ea typeface="Arial" pitchFamily="34" charset="-122"/>
                 <a:cs typeface="Arial" pitchFamily="34" charset="-120"/>
               </a:rPr>
-              <a:t>But that is exactly the value. Files of the same class share the same templates, so once the prompts are carved, every future file of this class can be checked the same way.</a:t>
+              <a:t>Same class, same templates → carve the prompts once, check every future file of the class.</a:t>
             </a:r>
             <a:endParaRPr lang="en-US" sz="1500" dirty="0"/>
           </a:p>
@@ -5435,7 +5435,7 @@
                 <a:ea typeface="Arial" pitchFamily="34" charset="-122"/>
                 <a:cs typeface="Arial" pitchFamily="34" charset="-120"/>
               </a:rPr>
-              <a:t>The example is specific; the method is general: think about what the task actually is, split it into steps, give each step structure, and iterate on the instructions. That recipe carries to any document class.</a:t>
+              <a:t>The example is specific; the method is general: define the task, split into steps, structure each step, iterate.</a:t>
             </a:r>
             <a:endParaRPr lang="en-US" sz="1500" dirty="0"/>
           </a:p>
@@ -5456,7 +5456,7 @@
                 <a:ea typeface="Arial" pitchFamily="34" charset="-122"/>
                 <a:cs typeface="Arial" pitchFamily="34" charset="-120"/>
               </a:rPr>
-              <a:t>The trade-off: the more specific the prompts, the more the model can finish — and the more customization work it takes. A Method A style prompt won't get there on Spark AIR; each task needs some tailoring. Whether that tailoring is cost-efficient is a case-by-case call.</a:t>
+              <a:t>Trade-off: more specific prompts → more capability, but more customization work. A Method A prompt won’t get there on Spark AIR; each task needs some tailoring. Cost-efficiency: case by case.</a:t>
             </a:r>
             <a:endParaRPr lang="en-US" sz="1500" dirty="0"/>
           </a:p>
@@ -5630,7 +5630,7 @@
                 <a:ea typeface="Arial" pitchFamily="34" charset="-122"/>
                 <a:cs typeface="Arial" pitchFamily="34" charset="-120"/>
               </a:rPr>
-              <a:t>Small models can do big jobs — as small steps. The same model went 10 for 10 on small targeted questions and 0 for 5 on the big vague ask. Decompose until every step sits inside the model's comfort zone: one document, one job, one checkable output.</a:t>
+              <a:t>Small models can do big jobs — as small steps. Same model: 10/10 on small questions, 0/5 on the big vague one.</a:t>
             </a:r>
             <a:endParaRPr lang="en-US" sz="1500" dirty="0"/>
           </a:p>
@@ -5651,7 +5651,7 @@
                 <a:ea typeface="Arial" pitchFamily="34" charset="-122"/>
                 <a:cs typeface="Arial" pitchFamily="34" charset="-120"/>
               </a:rPr>
-              <a:t>Reliability comes from process, not model size. Clear instructions, tidy formats, and a fixed procedure turned a 0-for-5 model into a 4.5-of-5 system — a dependable component for real internal use cases, without needing a larger model.</a:t>
+              <a:t>Reliability comes from process, not model size. 0/5 → 4.5/5 with no model change.</a:t>
             </a:r>
             <a:endParaRPr lang="en-US" sz="1500" dirty="0"/>
           </a:p>
@@ -5672,7 +5672,7 @@
                 <a:ea typeface="Arial" pitchFamily="34" charset="-122"/>
                 <a:cs typeface="Arial" pitchFamily="34" charset="-120"/>
               </a:rPr>
-              <a:t>The real win is diagnosability. In compliance work you must see where things fail. Step-by-step methods fail transparently; one-shots just answer wrong.</a:t>
+              <a:t>The real win is diagnosability — pipelines fail transparently; one-shots just answer wrong.</a:t>
             </a:r>
             <a:endParaRPr lang="en-US" sz="1500" dirty="0"/>
           </a:p>
@@ -5864,7 +5864,7 @@
                 <a:ea typeface="Arial" pitchFamily="34" charset="-122"/>
                 <a:cs typeface="Arial" pitchFamily="34" charset="-120"/>
               </a:rPr>
-              <a:t>This experiment was inspired by the File Review AI project — the extract-then-check philosophy demonstrated today grew out of that squad's work on structuring review tasks for AI.</a:t>
+              <a:t>Inspired by the File Review AI project — the extract-then-check approach comes from that squad’s work.</a:t>
             </a:r>
             <a:endParaRPr lang="en-US" sz="1500" dirty="0"/>
           </a:p>
@@ -6161,7 +6161,7 @@
                 <a:ea typeface="Arial" pitchFamily="34" charset="-122"/>
                 <a:cs typeface="Arial" pitchFamily="34" charset="-120"/>
               </a:rPr>
-              <a:t>Diagnosis — we read the intermediate tables: in the MUD RSR spreadsheet the characterizations sit in merged cells, so each label landed on one arbitrary year row, and the year-by-year comparison never saw the contradiction.</a:t>
+              <a:t>Diagnosis (from the intermediate tables): characterizations sit in merged cells in the MUD RSR → each label lands on one arbitrary year row → year-by-year comparison misses the contradiction.</a:t>
             </a:r>
             <a:endParaRPr lang="en-US" sz="1500" dirty="0"/>
           </a:p>
@@ -6378,7 +6378,7 @@
                 <a:ea typeface="Arial" pitchFamily="34" charset="-122"/>
                 <a:cs typeface="Arial" pitchFamily="34" charset="-120"/>
               </a:rPr>
-              <a:t>The fix — one added general rule: “Characterizations belong to the METRIC as a whole: repeat them on EVERY year row.” Plus two more: a decimal like 0.25 for a % metric = 25%, and compare years and dates inside footnotes too.</a:t>
+              <a:t>Fix — one general rule: “Characterizations belong to the METRIC as a whole: repeat them on EVERY year row.” Plus: decimal 0.25 = 25%; compare years/dates in footnotes too.</a:t>
             </a:r>
             <a:endParaRPr lang="en-US" sz="1500" dirty="0"/>
           </a:p>
@@ -6420,7 +6420,7 @@
                 <a:ea typeface="Arial" pitchFamily="34" charset="-122"/>
                 <a:cs typeface="Arial" pitchFamily="34" charset="-120"/>
               </a:rPr>
-              <a:t>Diagnosis: the compare step was doing two jobs at once — converting units AND comparing. It even computed the ×10 relationship correctly, and then still flagged the pair as inconsistent. Too much for one prompt.</a:t>
+              <a:t>Diagnosis: one step doing two jobs — converting units AND comparing. It computed the ×10 link, then flagged it anyway. Too much for one prompt.</a:t>
             </a:r>
             <a:endParaRPr lang="en-US" sz="1500" dirty="0"/>
           </a:p>
@@ -6441,7 +6441,7 @@
                 <a:ea typeface="Arial" pitchFamily="34" charset="-122"/>
                 <a:cs typeface="Arial" pitchFamily="34" charset="-120"/>
               </a:rPr>
-              <a:t>The fix: give normalization its own prompt — that is the final version.</a:t>
+              <a:t>Fix: normalization gets its own prompt → final version.</a:t>
             </a:r>
             <a:endParaRPr lang="en-US" sz="1500" dirty="0"/>
           </a:p>
@@ -6594,7 +6594,7 @@
                 <a:ea typeface="Arial" pitchFamily="34" charset="-122"/>
                 <a:cs typeface="Arial" pitchFamily="34" charset="-120"/>
               </a:rPr>
-              <a:t>The task — file review: behind every published rating sits a file — the analyst's internal record, the model outputs, and the published article. A file review is an independent re-check by an AQV reviewer who wasn't involved: were the criteria applied correctly? Is the record complete? Do the internal record and the published article tell the same story?</a:t>
+              <a:t>The task — file review: every published rating has a file behind it (internal record, model outputs, published article). An independent AQV re-check: criteria applied correctly, records complete, internal record vs publication consistent.</a:t>
             </a:r>
             <a:endParaRPr lang="en-US" sz="1500" dirty="0"/>
           </a:p>
@@ -6615,7 +6615,7 @@
                 <a:ea typeface="Arial" pitchFamily="34" charset="-122"/>
                 <a:cs typeface="Arial" pitchFamily="34" charset="-120"/>
               </a:rPr>
-              <a:t>The tool — Spark AIR: our internal AI platform, running gemma4-26B-A4B-it locally. Fast and local, but as a smaller model it can struggle with multi-step, high-complexity requests when everything is asked in a single prompt.</a:t>
+              <a:t>The tool — Spark AIR: internal AI platform, gemma4-26B-A4B-it running locally. Fast, but a small model — struggles with multi-step requests in a single prompt.</a:t>
             </a:r>
             <a:endParaRPr lang="en-US" sz="1500" dirty="0"/>
           </a:p>
@@ -6789,7 +6789,7 @@
                 <a:ea typeface="Arial" pitchFamily="34" charset="-122"/>
                 <a:cs typeface="Arial" pitchFamily="34" charset="-120"/>
               </a:rPr>
-              <a:t>A Colorado metropolitan district (name withheld — internal file) — series 2025 GO refunding bonds, rated BBB+ in Nov 2025.</a:t>
+              <a:t>A Colorado metropolitan district (name withheld) — series 2025 GO refunding bonds, rated BBB+ in Nov 2025.</a:t>
             </a:r>
             <a:endParaRPr lang="en-US" sz="1500" dirty="0"/>
           </a:p>
@@ -6981,7 +6981,7 @@
                 <a:ea typeface="Arial" pitchFamily="34" charset="-122"/>
                 <a:cs typeface="Arial" pitchFamily="34" charset="-120"/>
               </a:rPr>
-              <a:t>Why this file? Its official quality review logged real inconsistencies between the internal record and the publication — so we know exactly what a perfect answer looks like.</a:t>
+              <a:t>Why this file: its quality review already logged real inconsistencies → a known answer key.</a:t>
             </a:r>
             <a:endParaRPr lang="en-US" sz="1500" dirty="0"/>
           </a:p>
@@ -7020,7 +7020,7 @@
                 <a:ea typeface="Arial" pitchFamily="34" charset="-122"/>
                 <a:cs typeface="Arial" pitchFamily="34" charset="-120"/>
               </a:rPr>
-              <a:t>The task we gave the AI: the reviewer's consistency check — do these documents agree?</a:t>
+              <a:t>Task for the AI: the reviewer’s consistency check — do these documents agree?</a:t>
             </a:r>
             <a:endParaRPr lang="en-US" sz="1500" dirty="0"/>
           </a:p>
@@ -7169,7 +7169,7 @@
                 <a:ea typeface="Arial" pitchFamily="34" charset="-122"/>
                 <a:cs typeface="Arial" pitchFamily="34" charset="-120"/>
               </a:rPr>
-              <a:t>The property tax rates — same metrics, opposite judgments:</a:t>
+              <a:t>Property tax rate characterizations:</a:t>
             </a:r>
             <a:endParaRPr lang="en-US" sz="1500" dirty="0"/>
           </a:p>
@@ -7719,7 +7719,7 @@
                 <a:ea typeface="Arial" pitchFamily="34" charset="-122"/>
                 <a:cs typeface="Arial" pitchFamily="34" charset="-120"/>
               </a:rPr>
-              <a:t>The two documents report the same rates, but characterize them with opposite labels.</a:t>
+              <a:t>Same rates, opposite judgment labels.</a:t>
             </a:r>
             <a:endParaRPr lang="en-US" sz="1500" dirty="0"/>
           </a:p>
@@ -7740,7 +7740,7 @@
                 <a:ea typeface="Arial" pitchFamily="34" charset="-122"/>
                 <a:cs typeface="Arial" pitchFamily="34" charset="-120"/>
               </a:rPr>
-              <a:t>Both contradictions were logged as findings in the official quality review.</a:t>
+              <a:t>Both logged as findings in the official quality review.</a:t>
             </a:r>
             <a:endParaRPr lang="en-US" sz="1500" dirty="0"/>
           </a:p>
@@ -8591,7 +8591,7 @@
                 <a:ea typeface="Arial" pitchFamily="34" charset="-122"/>
                 <a:cs typeface="Arial" pitchFamily="34" charset="-120"/>
               </a:rPr>
-              <a:t>All five (E1–E5) were found by human reviewers — they are our answer key.</a:t>
+              <a:t>All five (E1–E5) found by human reviewers — our answer key.</a:t>
             </a:r>
             <a:endParaRPr lang="en-US" sz="1500" dirty="0"/>
           </a:p>
@@ -8612,7 +8612,7 @@
                 <a:ea typeface="Arial" pitchFamily="34" charset="-122"/>
                 <a:cs typeface="Arial" pitchFamily="34" charset="-120"/>
               </a:rPr>
-              <a:t>The model is never shown the answer key. We only score its output against it.</a:t>
+              <a:t>The model never sees the answer key — grading only.</a:t>
             </a:r>
             <a:endParaRPr lang="en-US" sz="1500" dirty="0"/>
           </a:p>
@@ -8722,7 +8722,7 @@
                 <a:ea typeface="Arial" pitchFamily="34" charset="-122"/>
                 <a:cs typeface="Arial" pitchFamily="34" charset="-120"/>
               </a:rPr>
-              <a:t>Method A: what most of us would type</a:t>
+              <a:t>Method A: one prompt, everything at once</a:t>
             </a:r>
             <a:endParaRPr lang="en-US" sz="2400" dirty="0"/>
           </a:p>
@@ -8829,7 +8829,7 @@
                 <a:ea typeface="Arial" pitchFamily="34" charset="-122"/>
                 <a:cs typeface="Arial" pitchFamily="34" charset="-120"/>
               </a:rPr>
-              <a:t>One message, all four documents, let the model figure it out.</a:t>
+              <a:t>One message, all four documents.</a:t>
             </a:r>
             <a:endParaRPr lang="en-US" sz="1500" dirty="0"/>
           </a:p>
@@ -8850,7 +8850,7 @@
                 <a:ea typeface="Arial" pitchFamily="34" charset="-122"/>
                 <a:cs typeface="Arial" pitchFamily="34" charset="-120"/>
               </a:rPr>
-              <a:t>A perfectly reasonable message — clear, polite, complete. Not a straw man: this is how busy analysts actually use AI assistants.</a:t>
+              <a:t>A reasonable, complete prompt — not a straw man.</a:t>
             </a:r>
             <a:endParaRPr lang="en-US" sz="1500" dirty="0"/>
           </a:p>
@@ -8871,7 +8871,7 @@
                 <a:ea typeface="Arial" pitchFamily="34" charset="-122"/>
                 <a:cs typeface="Arial" pitchFamily="34" charset="-120"/>
               </a:rPr>
-              <a:t>We ran it three times.</a:t>
+              <a:t>Ran 3 times.</a:t>
             </a:r>
             <a:endParaRPr lang="en-US" sz="1500" dirty="0"/>
           </a:p>
@@ -9045,7 +9045,7 @@
                 <a:ea typeface="Arial" pitchFamily="34" charset="-122"/>
                 <a:cs typeface="Arial" pitchFamily="34" charset="-120"/>
               </a:rPr>
-              <a:t>False alarms: 4 per run — and the three runs each gave a different answer</a:t>
+              <a:t>False alarms: 4 per run — and each run gave a different answer</a:t>
             </a:r>
             <a:endParaRPr lang="en-US" sz="1500" dirty="0"/>
           </a:p>
@@ -9066,7 +9066,7 @@
                 <a:ea typeface="Arial" pitchFamily="34" charset="-122"/>
                 <a:cs typeface="Arial" pitchFamily="34" charset="-120"/>
               </a:rPr>
-              <a:t>Typical false alarm: “6.88 vs 68.82 — inconsistent!” In fact this is the SAME number: the internal record quotes tax rates in $ per $100 of assessed value, the article quotes mills, and 1 mill = $0.10 per $100 — so 6.88 = 68.82. Meanwhile the real contradiction right next to those numbers — E1/E2, “Very Low” vs “High” — was never mentioned.</a:t>
+              <a:t>Typical false alarm: “6.88 vs 68.82 — inconsistent!” Same number, different units ($ per $100 of AV vs mills; 1 mill = $0.10 per $100). The real contradiction next to it — E1/E2, “Very Low” vs “High” — never mentioned.</a:t>
             </a:r>
             <a:endParaRPr lang="en-US" sz="1500" dirty="0"/>
           </a:p>
@@ -9087,7 +9087,7 @@
                 <a:ea typeface="Arial" pitchFamily="34" charset="-122"/>
                 <a:cs typeface="Arial" pitchFamily="34" charset="-120"/>
               </a:rPr>
-              <a:t>It reported fake differences and missed real ones — differently each time.</a:t>
+              <a:t>Fake differences reported; real ones missed; different every run.</a:t>
             </a:r>
             <a:endParaRPr lang="en-US" sz="1500" dirty="0"/>
           </a:p>
@@ -9304,7 +9304,7 @@
                 <a:ea typeface="Arial" pitchFamily="34" charset="-122"/>
                 <a:cs typeface="Arial" pitchFamily="34" charset="-120"/>
               </a:rPr>
-              <a:t>Retrieval by design — the model doesn't read whole files; it sees a handful of passages fetched from each document, so the two cells that contradict each other rarely arrive side by side.</a:t>
+              <a:t>Retrieval by design — the model sees a handful of retrieved passages, not whole files; contradicting cells rarely arrive together.</a:t>
             </a:r>
             <a:endParaRPr lang="en-US" sz="1500" dirty="0"/>
           </a:p>
@@ -9325,7 +9325,7 @@
                 <a:ea typeface="Arial" pitchFamily="34" charset="-122"/>
                 <a:cs typeface="Arial" pitchFamily="34" charset="-120"/>
               </a:rPr>
-              <a:t>No procedure to follow — “find all inconsistencies” gives it no structure, so each run improvises a different plan, and each plan misses something different.</a:t>
+              <a:t>No procedure — “find all inconsistencies” gives no structure; each run improvises and misses differently.</a:t>
             </a:r>
             <a:endParaRPr lang="en-US" sz="1500" dirty="0"/>
           </a:p>
@@ -9346,7 +9346,7 @@
                 <a:ea typeface="Arial" pitchFamily="34" charset="-122"/>
                 <a:cs typeface="Arial" pitchFamily="34" charset="-120"/>
               </a:rPr>
-              <a:t>Cross-document hops — matching a value in one file to a differently-labeled, differently-united value in another is challenging for a smaller model in a single prompt.</a:t>
+              <a:t>Cross-document matching — different labels + different units in one prompt: too many reasoning hops for a small model.</a:t>
             </a:r>
             <a:endParaRPr lang="en-US" sz="1500" dirty="0"/>
           </a:p>
@@ -9367,7 +9367,7 @@
                 <a:ea typeface="Arial" pitchFamily="34" charset="-122"/>
                 <a:cs typeface="Arial" pitchFamily="34" charset="-120"/>
               </a:rPr>
-              <a:t>But: asked one small, specific question at a time, the same model answered 10 out of 10 correctly, in about a second each.</a:t>
+              <a:t>But: on 10 small targeted questions, the same model scored 10/10, ~1 second each.</a:t>
             </a:r>
             <a:endParaRPr lang="en-US" sz="1500" dirty="0"/>
           </a:p>
@@ -9388,7 +9388,7 @@
                 <a:ea typeface="Arial" pitchFamily="34" charset="-122"/>
                 <a:cs typeface="Arial" pitchFamily="34" charset="-120"/>
               </a:rPr>
-              <a:t>The model is capable — the task shape was the problem.</a:t>
+              <a:t>The model is capable — the task structure is the problem.</a:t>
             </a:r>
             <a:endParaRPr lang="en-US" sz="1500" dirty="0"/>
           </a:p>
